--- a/entregas/veridit-apresentacao-arquitetura.pptx
+++ b/entregas/veridit-apresentacao-arquitetura.pptx
@@ -2800,6 +2800,42 @@
       </p:sp>
       <p:sp>
         <p:nvSpPr>
+          <p:cNvPr id="4" name="equipe da capa"/>
+          <p:cNvSpPr txBox="1"/>
+          <p:nvPr/>
+        </p:nvSpPr>
+        <p:spPr>
+          <a:xfrm>
+            <a:off x="731520" y="4343400"/>
+            <a:ext cx="10698480" cy="457200"/>
+          </a:xfrm>
+          <a:prstGeom prst="rect">
+            <a:avLst/>
+          </a:prstGeom>
+          <a:noFill/>
+          <a:ln/>
+        </p:spPr>
+        <p:txBody>
+          <a:bodyPr wrap="square" lIns="0" tIns="0" rIns="0" bIns="0" rtlCol="0" anchor="ctr"/>
+          <a:lstStyle/>
+          <a:p>
+            <a:pPr indent="0" marL="0">
+              <a:buNone/>
+            </a:pPr>
+            <a:r>
+              <a:rPr lang="en-US" sz="1600" dirty="0">
+                <a:solidFill>
+                  <a:schemeClr val="bg1"/>
+                </a:solidFill>
+              </a:rPr>
+              <a:t>Equipe: Cauã Marinho, João Ferraz, Guilherme Loiola e Davi Araújo</a:t>
+            </a:r>
+            <a:endParaRPr lang="en-US" sz="1400" dirty="0"/>
+          </a:p>
+        </p:txBody>
+      </p:sp>
+      <p:sp>
+        <p:nvSpPr>
           <p:cNvPr id="5" name="selo círculo"/>
           <p:cNvSpPr/>
           <p:nvPr/>
@@ -6982,7 +7018,7 @@
                   <a:schemeClr val="bg1"/>
                 </a:solidFill>
               </a:rPr>
-              <a:t>Protótipo das telas no Figma</a:t>
+              <a:t>Testar o protótipo das 14 telas com usuários</a:t>
             </a:r>
             <a:endParaRPr lang="en-US" sz="1600" dirty="0"/>
           </a:p>
